--- a/Assets/Editor/UImaking/10.3.pptx
+++ b/Assets/Editor/UImaking/10.3.pptx
@@ -5,10 +5,12 @@
     <p:sldMasterId id="2147483648" r:id="rId1"/>
   </p:sldMasterIdLst>
   <p:notesMasterIdLst>
-    <p:notesMasterId r:id="rId3"/>
+    <p:notesMasterId r:id="rId5"/>
   </p:notesMasterIdLst>
   <p:sldIdLst>
     <p:sldId id="256" r:id="rId2"/>
+    <p:sldId id="257" r:id="rId3"/>
+    <p:sldId id="258" r:id="rId4"/>
   </p:sldIdLst>
   <p:sldSz cx="12192000" cy="6858000"/>
   <p:notesSz cx="6858000" cy="9144000"/>
@@ -197,7 +199,7 @@
           <a:p>
             <a:fld id="{5319965B-D325-0446-802A-EE69CB5E11F9}" type="datetimeFigureOut">
               <a:rPr kumimoji="1" lang="ja-JP" altLang="en-US" smtClean="0"/>
-              <a:t>2026/8/17</a:t>
+              <a:t>2026/8/25</a:t>
             </a:fld>
             <a:endParaRPr kumimoji="1" lang="ja-JP" altLang="en-US"/>
           </a:p>
@@ -496,6 +498,90 @@
 </p:notesMaster>
 </file>
 
+<file path=ppt/notesSlides/notesSlide1.xml><?xml version="1.0" encoding="utf-8"?>
+<p:notes xmlns:a="http://schemas.openxmlformats.org/drawingml/2006/main" xmlns:r="http://schemas.openxmlformats.org/officeDocument/2006/relationships" xmlns:p="http://schemas.openxmlformats.org/presentationml/2006/main">
+  <p:cSld>
+    <p:spTree>
+      <p:nvGrpSpPr>
+        <p:cNvPr id="1" name=""/>
+        <p:cNvGrpSpPr/>
+        <p:nvPr/>
+      </p:nvGrpSpPr>
+      <p:grpSpPr>
+        <a:xfrm>
+          <a:off x="0" y="0"/>
+          <a:ext cx="0" cy="0"/>
+          <a:chOff x="0" y="0"/>
+          <a:chExt cx="0" cy="0"/>
+        </a:xfrm>
+      </p:grpSpPr>
+      <p:sp>
+        <p:nvSpPr>
+          <p:cNvPr id="2" name="スライド イメージ プレースホルダー 1"/>
+          <p:cNvSpPr>
+            <a:spLocks noGrp="1" noRot="1" noChangeAspect="1"/>
+          </p:cNvSpPr>
+          <p:nvPr>
+            <p:ph type="sldImg"/>
+          </p:nvPr>
+        </p:nvSpPr>
+        <p:spPr/>
+      </p:sp>
+      <p:sp>
+        <p:nvSpPr>
+          <p:cNvPr id="3" name="ノート プレースホルダー 2"/>
+          <p:cNvSpPr>
+            <a:spLocks noGrp="1"/>
+          </p:cNvSpPr>
+          <p:nvPr>
+            <p:ph type="body" idx="1"/>
+          </p:nvPr>
+        </p:nvSpPr>
+        <p:spPr/>
+        <p:txBody>
+          <a:bodyPr/>
+          <a:lstStyle/>
+          <a:p>
+            <a:endParaRPr kumimoji="1" lang="ja-JP" altLang="en-US"/>
+          </a:p>
+        </p:txBody>
+      </p:sp>
+      <p:sp>
+        <p:nvSpPr>
+          <p:cNvPr id="4" name="スライド番号プレースホルダー 3"/>
+          <p:cNvSpPr>
+            <a:spLocks noGrp="1"/>
+          </p:cNvSpPr>
+          <p:nvPr>
+            <p:ph type="sldNum" sz="quarter" idx="5"/>
+          </p:nvPr>
+        </p:nvSpPr>
+        <p:spPr/>
+        <p:txBody>
+          <a:bodyPr/>
+          <a:lstStyle/>
+          <a:p>
+            <a:fld id="{7C6318C2-A468-BC49-96C5-D3F31AC41736}" type="slidenum">
+              <a:rPr kumimoji="1" lang="ja-JP" altLang="en-US" smtClean="0"/>
+              <a:t>3</a:t>
+            </a:fld>
+            <a:endParaRPr kumimoji="1" lang="ja-JP" altLang="en-US"/>
+          </a:p>
+        </p:txBody>
+      </p:sp>
+    </p:spTree>
+    <p:extLst>
+      <p:ext uri="{BB962C8B-B14F-4D97-AF65-F5344CB8AC3E}">
+        <p14:creationId xmlns:p14="http://schemas.microsoft.com/office/powerpoint/2010/main" val="563412502"/>
+      </p:ext>
+    </p:extLst>
+  </p:cSld>
+  <p:clrMapOvr>
+    <a:masterClrMapping/>
+  </p:clrMapOvr>
+</p:notes>
+</file>
+
 <file path=ppt/slideLayouts/slideLayout1.xml><?xml version="1.0" encoding="utf-8"?>
 <p:sldLayout xmlns:a="http://schemas.openxmlformats.org/drawingml/2006/main" xmlns:r="http://schemas.openxmlformats.org/officeDocument/2006/relationships" xmlns:p="http://schemas.openxmlformats.org/presentationml/2006/main" type="title" preserve="1">
   <p:cSld name="タイトル スライド">
@@ -643,7 +729,7 @@
           <a:p>
             <a:fld id="{4F61EA4F-D360-6D46-B329-DD6D84180C84}" type="datetimeFigureOut">
               <a:rPr kumimoji="1" lang="ja-JP" altLang="en-US" smtClean="0"/>
-              <a:t>2026/8/17</a:t>
+              <a:t>2026/8/25</a:t>
             </a:fld>
             <a:endParaRPr kumimoji="1" lang="ja-JP" altLang="en-US"/>
           </a:p>
@@ -873,7 +959,7 @@
           <a:p>
             <a:fld id="{4F61EA4F-D360-6D46-B329-DD6D84180C84}" type="datetimeFigureOut">
               <a:rPr kumimoji="1" lang="ja-JP" altLang="en-US" smtClean="0"/>
-              <a:t>2026/8/17</a:t>
+              <a:t>2026/8/25</a:t>
             </a:fld>
             <a:endParaRPr kumimoji="1" lang="ja-JP" altLang="en-US"/>
           </a:p>
@@ -1113,7 +1199,7 @@
           <a:p>
             <a:fld id="{4F61EA4F-D360-6D46-B329-DD6D84180C84}" type="datetimeFigureOut">
               <a:rPr kumimoji="1" lang="ja-JP" altLang="en-US" smtClean="0"/>
-              <a:t>2026/8/17</a:t>
+              <a:t>2026/8/25</a:t>
             </a:fld>
             <a:endParaRPr kumimoji="1" lang="ja-JP" altLang="en-US"/>
           </a:p>
@@ -1343,7 +1429,7 @@
           <a:p>
             <a:fld id="{4F61EA4F-D360-6D46-B329-DD6D84180C84}" type="datetimeFigureOut">
               <a:rPr kumimoji="1" lang="ja-JP" altLang="en-US" smtClean="0"/>
-              <a:t>2026/8/17</a:t>
+              <a:t>2026/8/25</a:t>
             </a:fld>
             <a:endParaRPr kumimoji="1" lang="ja-JP" altLang="en-US"/>
           </a:p>
@@ -1618,7 +1704,7 @@
           <a:p>
             <a:fld id="{4F61EA4F-D360-6D46-B329-DD6D84180C84}" type="datetimeFigureOut">
               <a:rPr kumimoji="1" lang="ja-JP" altLang="en-US" smtClean="0"/>
-              <a:t>2026/8/17</a:t>
+              <a:t>2026/8/25</a:t>
             </a:fld>
             <a:endParaRPr kumimoji="1" lang="ja-JP" altLang="en-US"/>
           </a:p>
@@ -1947,7 +2033,7 @@
           <a:p>
             <a:fld id="{4F61EA4F-D360-6D46-B329-DD6D84180C84}" type="datetimeFigureOut">
               <a:rPr kumimoji="1" lang="ja-JP" altLang="en-US" smtClean="0"/>
-              <a:t>2026/8/17</a:t>
+              <a:t>2026/8/25</a:t>
             </a:fld>
             <a:endParaRPr kumimoji="1" lang="ja-JP" altLang="en-US"/>
           </a:p>
@@ -2423,7 +2509,7 @@
           <a:p>
             <a:fld id="{4F61EA4F-D360-6D46-B329-DD6D84180C84}" type="datetimeFigureOut">
               <a:rPr kumimoji="1" lang="ja-JP" altLang="en-US" smtClean="0"/>
-              <a:t>2026/8/17</a:t>
+              <a:t>2026/8/25</a:t>
             </a:fld>
             <a:endParaRPr kumimoji="1" lang="ja-JP" altLang="en-US"/>
           </a:p>
@@ -2564,7 +2650,7 @@
           <a:p>
             <a:fld id="{4F61EA4F-D360-6D46-B329-DD6D84180C84}" type="datetimeFigureOut">
               <a:rPr kumimoji="1" lang="ja-JP" altLang="en-US" smtClean="0"/>
-              <a:t>2026/8/17</a:t>
+              <a:t>2026/8/25</a:t>
             </a:fld>
             <a:endParaRPr kumimoji="1" lang="ja-JP" altLang="en-US"/>
           </a:p>
@@ -2677,7 +2763,7 @@
           <a:p>
             <a:fld id="{4F61EA4F-D360-6D46-B329-DD6D84180C84}" type="datetimeFigureOut">
               <a:rPr kumimoji="1" lang="ja-JP" altLang="en-US" smtClean="0"/>
-              <a:t>2026/8/17</a:t>
+              <a:t>2026/8/25</a:t>
             </a:fld>
             <a:endParaRPr kumimoji="1" lang="ja-JP" altLang="en-US"/>
           </a:p>
@@ -3020,7 +3106,7 @@
           <a:p>
             <a:fld id="{4F61EA4F-D360-6D46-B329-DD6D84180C84}" type="datetimeFigureOut">
               <a:rPr kumimoji="1" lang="ja-JP" altLang="en-US" smtClean="0"/>
-              <a:t>2026/8/17</a:t>
+              <a:t>2026/8/25</a:t>
             </a:fld>
             <a:endParaRPr kumimoji="1" lang="ja-JP" altLang="en-US"/>
           </a:p>
@@ -3308,7 +3394,7 @@
           <a:p>
             <a:fld id="{4F61EA4F-D360-6D46-B329-DD6D84180C84}" type="datetimeFigureOut">
               <a:rPr kumimoji="1" lang="ja-JP" altLang="en-US" smtClean="0"/>
-              <a:t>2026/8/17</a:t>
+              <a:t>2026/8/25</a:t>
             </a:fld>
             <a:endParaRPr kumimoji="1" lang="ja-JP" altLang="en-US"/>
           </a:p>
@@ -3581,7 +3667,7 @@
           <a:p>
             <a:fld id="{4F61EA4F-D360-6D46-B329-DD6D84180C84}" type="datetimeFigureOut">
               <a:rPr kumimoji="1" lang="ja-JP" altLang="en-US" smtClean="0"/>
-              <a:t>2026/8/17</a:t>
+              <a:t>2026/8/25</a:t>
             </a:fld>
             <a:endParaRPr kumimoji="1" lang="ja-JP" altLang="en-US"/>
           </a:p>
@@ -6141,6 +6227,416 @@
     <p:extLst>
       <p:ext uri="{BB962C8B-B14F-4D97-AF65-F5344CB8AC3E}">
         <p14:creationId xmlns:p14="http://schemas.microsoft.com/office/powerpoint/2010/main" val="3942482290"/>
+      </p:ext>
+    </p:extLst>
+  </p:cSld>
+  <p:clrMapOvr>
+    <a:masterClrMapping/>
+  </p:clrMapOvr>
+</p:sld>
+</file>
+
+<file path=ppt/slides/slide2.xml><?xml version="1.0" encoding="utf-8"?>
+<p:sld xmlns:a="http://schemas.openxmlformats.org/drawingml/2006/main" xmlns:r="http://schemas.openxmlformats.org/officeDocument/2006/relationships" xmlns:p="http://schemas.openxmlformats.org/presentationml/2006/main">
+  <p:cSld>
+    <p:bg>
+      <p:bgPr>
+        <a:solidFill>
+          <a:schemeClr val="tx1">
+            <a:lumMod val="50000"/>
+            <a:lumOff val="50000"/>
+          </a:schemeClr>
+        </a:solidFill>
+        <a:effectLst/>
+      </p:bgPr>
+    </p:bg>
+    <p:spTree>
+      <p:nvGrpSpPr>
+        <p:cNvPr id="1" name=""/>
+        <p:cNvGrpSpPr/>
+        <p:nvPr/>
+      </p:nvGrpSpPr>
+      <p:grpSpPr>
+        <a:xfrm>
+          <a:off x="0" y="0"/>
+          <a:ext cx="0" cy="0"/>
+          <a:chOff x="0" y="0"/>
+          <a:chExt cx="0" cy="0"/>
+        </a:xfrm>
+      </p:grpSpPr>
+      <p:pic>
+        <p:nvPicPr>
+          <p:cNvPr id="4" name="図 3">
+            <a:extLst>
+              <a:ext uri="{FF2B5EF4-FFF2-40B4-BE49-F238E27FC236}">
+                <a16:creationId xmlns:a16="http://schemas.microsoft.com/office/drawing/2014/main" id="{024ED21E-75FB-DF82-F3B1-5C44CED3EB45}"/>
+              </a:ext>
+            </a:extLst>
+          </p:cNvPr>
+          <p:cNvPicPr>
+            <a:picLocks noChangeAspect="1"/>
+          </p:cNvPicPr>
+          <p:nvPr/>
+        </p:nvPicPr>
+        <p:blipFill>
+          <a:blip r:embed="rId2"/>
+          <a:stretch>
+            <a:fillRect/>
+          </a:stretch>
+        </p:blipFill>
+        <p:spPr>
+          <a:xfrm>
+            <a:off x="-304800" y="-279636"/>
+            <a:ext cx="7772400" cy="4794388"/>
+          </a:xfrm>
+          <a:prstGeom prst="rect">
+            <a:avLst/>
+          </a:prstGeom>
+        </p:spPr>
+      </p:pic>
+      <p:pic>
+        <p:nvPicPr>
+          <p:cNvPr id="5" name="図 4">
+            <a:extLst>
+              <a:ext uri="{FF2B5EF4-FFF2-40B4-BE49-F238E27FC236}">
+                <a16:creationId xmlns:a16="http://schemas.microsoft.com/office/drawing/2014/main" id="{62FBC2D8-A040-71B4-E654-1670C222AABA}"/>
+              </a:ext>
+            </a:extLst>
+          </p:cNvPr>
+          <p:cNvPicPr>
+            <a:picLocks noChangeAspect="1"/>
+          </p:cNvPicPr>
+          <p:nvPr/>
+        </p:nvPicPr>
+        <p:blipFill>
+          <a:blip r:embed="rId3"/>
+          <a:stretch>
+            <a:fillRect/>
+          </a:stretch>
+        </p:blipFill>
+        <p:spPr>
+          <a:xfrm>
+            <a:off x="1083845" y="934787"/>
+            <a:ext cx="7353300" cy="368300"/>
+          </a:xfrm>
+          <a:prstGeom prst="rect">
+            <a:avLst/>
+          </a:prstGeom>
+        </p:spPr>
+      </p:pic>
+    </p:spTree>
+    <p:extLst>
+      <p:ext uri="{BB962C8B-B14F-4D97-AF65-F5344CB8AC3E}">
+        <p14:creationId xmlns:p14="http://schemas.microsoft.com/office/powerpoint/2010/main" val="3215640863"/>
+      </p:ext>
+    </p:extLst>
+  </p:cSld>
+  <p:clrMapOvr>
+    <a:masterClrMapping/>
+  </p:clrMapOvr>
+</p:sld>
+</file>
+
+<file path=ppt/slides/slide3.xml><?xml version="1.0" encoding="utf-8"?>
+<p:sld xmlns:a="http://schemas.openxmlformats.org/drawingml/2006/main" xmlns:r="http://schemas.openxmlformats.org/officeDocument/2006/relationships" xmlns:p="http://schemas.openxmlformats.org/presentationml/2006/main">
+  <p:cSld>
+    <p:bg>
+      <p:bgPr>
+        <a:solidFill>
+          <a:schemeClr val="tx1">
+            <a:lumMod val="50000"/>
+            <a:lumOff val="50000"/>
+          </a:schemeClr>
+        </a:solidFill>
+        <a:effectLst/>
+      </p:bgPr>
+    </p:bg>
+    <p:spTree>
+      <p:nvGrpSpPr>
+        <p:cNvPr id="1" name=""/>
+        <p:cNvGrpSpPr/>
+        <p:nvPr/>
+      </p:nvGrpSpPr>
+      <p:grpSpPr>
+        <a:xfrm>
+          <a:off x="0" y="0"/>
+          <a:ext cx="0" cy="0"/>
+          <a:chOff x="0" y="0"/>
+          <a:chExt cx="0" cy="0"/>
+        </a:xfrm>
+      </p:grpSpPr>
+      <p:pic>
+        <p:nvPicPr>
+          <p:cNvPr id="14" name="図 13">
+            <a:extLst>
+              <a:ext uri="{FF2B5EF4-FFF2-40B4-BE49-F238E27FC236}">
+                <a16:creationId xmlns:a16="http://schemas.microsoft.com/office/drawing/2014/main" id="{F9671B07-EC23-0EE6-8E32-B7584E602DD9}"/>
+              </a:ext>
+            </a:extLst>
+          </p:cNvPr>
+          <p:cNvPicPr>
+            <a:picLocks noChangeAspect="1"/>
+          </p:cNvPicPr>
+          <p:nvPr/>
+        </p:nvPicPr>
+        <p:blipFill>
+          <a:blip r:embed="rId3"/>
+          <a:stretch>
+            <a:fillRect/>
+          </a:stretch>
+        </p:blipFill>
+        <p:spPr>
+          <a:xfrm>
+            <a:off x="0" y="0"/>
+            <a:ext cx="5636981" cy="3366744"/>
+          </a:xfrm>
+          <a:prstGeom prst="rect">
+            <a:avLst/>
+          </a:prstGeom>
+        </p:spPr>
+      </p:pic>
+      <p:pic>
+        <p:nvPicPr>
+          <p:cNvPr id="13" name="図 12">
+            <a:extLst>
+              <a:ext uri="{FF2B5EF4-FFF2-40B4-BE49-F238E27FC236}">
+                <a16:creationId xmlns:a16="http://schemas.microsoft.com/office/drawing/2014/main" id="{697A9C4F-78BA-05F9-EDD0-E2DA5CD1B6D2}"/>
+              </a:ext>
+            </a:extLst>
+          </p:cNvPr>
+          <p:cNvPicPr>
+            <a:picLocks noChangeAspect="1"/>
+          </p:cNvPicPr>
+          <p:nvPr/>
+        </p:nvPicPr>
+        <p:blipFill>
+          <a:blip r:embed="rId4"/>
+          <a:stretch>
+            <a:fillRect/>
+          </a:stretch>
+        </p:blipFill>
+        <p:spPr>
+          <a:xfrm>
+            <a:off x="86632" y="3522385"/>
+            <a:ext cx="5636981" cy="3366744"/>
+          </a:xfrm>
+          <a:prstGeom prst="rect">
+            <a:avLst/>
+          </a:prstGeom>
+        </p:spPr>
+      </p:pic>
+      <p:pic>
+        <p:nvPicPr>
+          <p:cNvPr id="8" name="図 7">
+            <a:extLst>
+              <a:ext uri="{FF2B5EF4-FFF2-40B4-BE49-F238E27FC236}">
+                <a16:creationId xmlns:a16="http://schemas.microsoft.com/office/drawing/2014/main" id="{0473D4F9-64EC-A57A-0F62-2370E78FF3E7}"/>
+              </a:ext>
+            </a:extLst>
+          </p:cNvPr>
+          <p:cNvPicPr>
+            <a:picLocks noChangeAspect="1"/>
+          </p:cNvPicPr>
+          <p:nvPr/>
+        </p:nvPicPr>
+        <p:blipFill>
+          <a:blip r:embed="rId5"/>
+          <a:srcRect l="81607" t="89300" r="13736" b="7374"/>
+          <a:stretch>
+            <a:fillRect/>
+          </a:stretch>
+        </p:blipFill>
+        <p:spPr>
+          <a:xfrm>
+            <a:off x="1551372" y="2963236"/>
+            <a:ext cx="3028540" cy="126551"/>
+          </a:xfrm>
+          <a:custGeom>
+            <a:avLst/>
+            <a:gdLst>
+              <a:gd name="connsiteX0" fmla="*/ 0 w 273343"/>
+              <a:gd name="connsiteY0" fmla="*/ 0 h 104131"/>
+              <a:gd name="connsiteX1" fmla="*/ 273343 w 273343"/>
+              <a:gd name="connsiteY1" fmla="*/ 0 h 104131"/>
+              <a:gd name="connsiteX2" fmla="*/ 273343 w 273343"/>
+              <a:gd name="connsiteY2" fmla="*/ 104131 h 104131"/>
+              <a:gd name="connsiteX3" fmla="*/ 0 w 273343"/>
+              <a:gd name="connsiteY3" fmla="*/ 104131 h 104131"/>
+            </a:gdLst>
+            <a:ahLst/>
+            <a:cxnLst>
+              <a:cxn ang="0">
+                <a:pos x="connsiteX0" y="connsiteY0"/>
+              </a:cxn>
+              <a:cxn ang="0">
+                <a:pos x="connsiteX1" y="connsiteY1"/>
+              </a:cxn>
+              <a:cxn ang="0">
+                <a:pos x="connsiteX2" y="connsiteY2"/>
+              </a:cxn>
+              <a:cxn ang="0">
+                <a:pos x="connsiteX3" y="connsiteY3"/>
+              </a:cxn>
+            </a:cxnLst>
+            <a:rect l="l" t="t" r="r" b="b"/>
+            <a:pathLst>
+              <a:path w="273343" h="104131">
+                <a:moveTo>
+                  <a:pt x="0" y="0"/>
+                </a:moveTo>
+                <a:lnTo>
+                  <a:pt x="273343" y="0"/>
+                </a:lnTo>
+                <a:lnTo>
+                  <a:pt x="273343" y="104131"/>
+                </a:lnTo>
+                <a:lnTo>
+                  <a:pt x="0" y="104131"/>
+                </a:lnTo>
+                <a:close/>
+              </a:path>
+            </a:pathLst>
+          </a:custGeom>
+        </p:spPr>
+      </p:pic>
+      <p:pic>
+        <p:nvPicPr>
+          <p:cNvPr id="12" name="図 11">
+            <a:extLst>
+              <a:ext uri="{FF2B5EF4-FFF2-40B4-BE49-F238E27FC236}">
+                <a16:creationId xmlns:a16="http://schemas.microsoft.com/office/drawing/2014/main" id="{43924A28-3AE1-0101-435D-22837C34BCBF}"/>
+              </a:ext>
+            </a:extLst>
+          </p:cNvPr>
+          <p:cNvPicPr>
+            <a:picLocks noChangeAspect="1"/>
+          </p:cNvPicPr>
+          <p:nvPr/>
+        </p:nvPicPr>
+        <p:blipFill>
+          <a:blip r:embed="rId6"/>
+          <a:srcRect l="81832" t="89280" r="14652" b="7272"/>
+          <a:stretch>
+            <a:fillRect/>
+          </a:stretch>
+        </p:blipFill>
+        <p:spPr>
+          <a:xfrm>
+            <a:off x="1551375" y="6485620"/>
+            <a:ext cx="2245925" cy="127970"/>
+          </a:xfrm>
+          <a:custGeom>
+            <a:avLst/>
+            <a:gdLst>
+              <a:gd name="connsiteX0" fmla="*/ 0 w 206375"/>
+              <a:gd name="connsiteY0" fmla="*/ 0 h 107950"/>
+              <a:gd name="connsiteX1" fmla="*/ 206375 w 206375"/>
+              <a:gd name="connsiteY1" fmla="*/ 0 h 107950"/>
+              <a:gd name="connsiteX2" fmla="*/ 206375 w 206375"/>
+              <a:gd name="connsiteY2" fmla="*/ 107950 h 107950"/>
+              <a:gd name="connsiteX3" fmla="*/ 0 w 206375"/>
+              <a:gd name="connsiteY3" fmla="*/ 107950 h 107950"/>
+            </a:gdLst>
+            <a:ahLst/>
+            <a:cxnLst>
+              <a:cxn ang="0">
+                <a:pos x="connsiteX0" y="connsiteY0"/>
+              </a:cxn>
+              <a:cxn ang="0">
+                <a:pos x="connsiteX1" y="connsiteY1"/>
+              </a:cxn>
+              <a:cxn ang="0">
+                <a:pos x="connsiteX2" y="connsiteY2"/>
+              </a:cxn>
+              <a:cxn ang="0">
+                <a:pos x="connsiteX3" y="connsiteY3"/>
+              </a:cxn>
+            </a:cxnLst>
+            <a:rect l="l" t="t" r="r" b="b"/>
+            <a:pathLst>
+              <a:path w="206375" h="107950">
+                <a:moveTo>
+                  <a:pt x="0" y="0"/>
+                </a:moveTo>
+                <a:lnTo>
+                  <a:pt x="206375" y="0"/>
+                </a:lnTo>
+                <a:lnTo>
+                  <a:pt x="206375" y="107950"/>
+                </a:lnTo>
+                <a:lnTo>
+                  <a:pt x="0" y="107950"/>
+                </a:lnTo>
+                <a:close/>
+              </a:path>
+            </a:pathLst>
+          </a:custGeom>
+        </p:spPr>
+      </p:pic>
+      <p:pic>
+        <p:nvPicPr>
+          <p:cNvPr id="23" name="図 22">
+            <a:extLst>
+              <a:ext uri="{FF2B5EF4-FFF2-40B4-BE49-F238E27FC236}">
+                <a16:creationId xmlns:a16="http://schemas.microsoft.com/office/drawing/2014/main" id="{3C927801-D6D9-C68F-7E48-6697966BDBE6}"/>
+              </a:ext>
+            </a:extLst>
+          </p:cNvPr>
+          <p:cNvPicPr>
+            <a:picLocks noChangeAspect="1"/>
+          </p:cNvPicPr>
+          <p:nvPr/>
+        </p:nvPicPr>
+        <p:blipFill>
+          <a:blip r:embed="rId7"/>
+          <a:stretch>
+            <a:fillRect/>
+          </a:stretch>
+        </p:blipFill>
+        <p:spPr>
+          <a:xfrm>
+            <a:off x="5723613" y="0"/>
+            <a:ext cx="256177" cy="3429000"/>
+          </a:xfrm>
+          <a:prstGeom prst="rect">
+            <a:avLst/>
+          </a:prstGeom>
+        </p:spPr>
+      </p:pic>
+      <p:pic>
+        <p:nvPicPr>
+          <p:cNvPr id="24" name="図 23">
+            <a:extLst>
+              <a:ext uri="{FF2B5EF4-FFF2-40B4-BE49-F238E27FC236}">
+                <a16:creationId xmlns:a16="http://schemas.microsoft.com/office/drawing/2014/main" id="{1999CB72-DD1F-D799-EF99-3B82D42D1B29}"/>
+              </a:ext>
+            </a:extLst>
+          </p:cNvPr>
+          <p:cNvPicPr>
+            <a:picLocks noChangeAspect="1"/>
+          </p:cNvPicPr>
+          <p:nvPr/>
+        </p:nvPicPr>
+        <p:blipFill>
+          <a:blip r:embed="rId7"/>
+          <a:stretch>
+            <a:fillRect/>
+          </a:stretch>
+        </p:blipFill>
+        <p:spPr>
+          <a:xfrm>
+            <a:off x="5810244" y="3491257"/>
+            <a:ext cx="256177" cy="3429000"/>
+          </a:xfrm>
+          <a:prstGeom prst="rect">
+            <a:avLst/>
+          </a:prstGeom>
+        </p:spPr>
+      </p:pic>
+    </p:spTree>
+    <p:extLst>
+      <p:ext uri="{BB962C8B-B14F-4D97-AF65-F5344CB8AC3E}">
+        <p14:creationId xmlns:p14="http://schemas.microsoft.com/office/powerpoint/2010/main" val="942985691"/>
       </p:ext>
     </p:extLst>
   </p:cSld>
